--- a/studionx/frontend-reference/images/main page reference/레퍼런스및수정사항.pptx
+++ b/studionx/frontend-reference/images/main page reference/레퍼런스및수정사항.pptx
@@ -6,8 +6,10 @@
   </p:sldMasterIdLst>
   <p:sldIdLst>
     <p:sldId id="256" r:id="rId2"/>
-    <p:sldId id="257" r:id="rId3"/>
-    <p:sldId id="258" r:id="rId4"/>
+    <p:sldId id="259" r:id="rId3"/>
+    <p:sldId id="257" r:id="rId4"/>
+    <p:sldId id="258" r:id="rId5"/>
+    <p:sldId id="260" r:id="rId6"/>
   </p:sldIdLst>
   <p:sldSz cx="12192000" cy="6858000"/>
   <p:notesSz cx="6858000" cy="9144000"/>
@@ -3822,6 +3824,718 @@
         <p:spPr>
           <a:xfrm>
             <a:off x="205015" y="204305"/>
+            <a:ext cx="4030363" cy="517690"/>
+          </a:xfrm>
+          <a:prstGeom prst="rect">
+            <a:avLst/>
+          </a:prstGeom>
+        </p:spPr>
+        <p:txBody>
+          <a:bodyPr wrap="square">
+            <a:spAutoFit/>
+          </a:bodyPr>
+          <a:p>
+            <a:pPr lvl="0">
+              <a:defRPr/>
+            </a:pPr>
+            <a:r>
+              <a:rPr lang="ko-KR" altLang="en-US" sz="2800"/>
+              <a:t>전체 페이지 구조</a:t>
+            </a:r>
+            <a:endParaRPr lang="ko-KR" altLang="en-US" sz="2800"/>
+          </a:p>
+        </p:txBody>
+      </p:sp>
+      <p:grpSp>
+        <p:nvGrpSpPr>
+          <p:cNvPr id="21" name=""/>
+          <p:cNvGrpSpPr/>
+          <p:nvPr/>
+        </p:nvGrpSpPr>
+        <p:grpSpPr>
+          <a:xfrm rot="0">
+            <a:off x="3476149" y="656166"/>
+            <a:ext cx="5239702" cy="5256920"/>
+            <a:chOff x="3262312" y="656166"/>
+            <a:chExt cx="5239702" cy="5256920"/>
+          </a:xfrm>
+        </p:grpSpPr>
+        <p:sp>
+          <p:nvSpPr>
+            <p:cNvPr id="6" name="직사각형 5"/>
+            <p:cNvSpPr/>
+            <p:nvPr/>
+          </p:nvSpPr>
+          <p:spPr>
+            <a:xfrm>
+              <a:off x="3262312" y="656166"/>
+              <a:ext cx="2178844" cy="1143000"/>
+            </a:xfrm>
+            <a:prstGeom prst="rect">
+              <a:avLst/>
+            </a:prstGeom>
+            <a:noFill/>
+            <a:ln w="38100">
+              <a:solidFill>
+                <a:srgbClr val="ff0000"/>
+              </a:solidFill>
+            </a:ln>
+          </p:spPr>
+          <p:style>
+            <a:lnRef idx="2">
+              <a:schemeClr val="accent1">
+                <a:shade val="20000"/>
+              </a:schemeClr>
+            </a:lnRef>
+            <a:fillRef idx="1">
+              <a:schemeClr val="accent1"/>
+            </a:fillRef>
+            <a:effectRef idx="0">
+              <a:schemeClr val="accent1"/>
+            </a:effectRef>
+            <a:fontRef idx="minor">
+              <a:schemeClr val="lt1"/>
+            </a:fontRef>
+          </p:style>
+          <p:txBody>
+            <a:bodyPr anchor="ctr"/>
+            <a:p>
+              <a:pPr lvl="0" algn="ctr">
+                <a:defRPr/>
+              </a:pPr>
+              <a:endParaRPr lang="ko-KR" altLang="en-US"/>
+            </a:p>
+          </p:txBody>
+        </p:sp>
+        <p:sp>
+          <p:nvSpPr>
+            <p:cNvPr id="7" name="직사각형 6"/>
+            <p:cNvSpPr/>
+            <p:nvPr/>
+          </p:nvSpPr>
+          <p:spPr>
+            <a:xfrm>
+              <a:off x="3262312" y="1834885"/>
+              <a:ext cx="2178844" cy="1143000"/>
+            </a:xfrm>
+            <a:prstGeom prst="rect">
+              <a:avLst/>
+            </a:prstGeom>
+            <a:noFill/>
+            <a:ln w="38100">
+              <a:solidFill>
+                <a:srgbClr val="ff0000"/>
+              </a:solidFill>
+            </a:ln>
+          </p:spPr>
+          <p:style>
+            <a:lnRef idx="2">
+              <a:schemeClr val="accent1">
+                <a:shade val="20000"/>
+              </a:schemeClr>
+            </a:lnRef>
+            <a:fillRef idx="1">
+              <a:schemeClr val="accent1"/>
+            </a:fillRef>
+            <a:effectRef idx="0">
+              <a:schemeClr val="accent1"/>
+            </a:effectRef>
+            <a:fontRef idx="minor">
+              <a:schemeClr val="lt1"/>
+            </a:fontRef>
+          </p:style>
+          <p:txBody>
+            <a:bodyPr anchor="ctr"/>
+            <a:p>
+              <a:pPr lvl="0" algn="ctr">
+                <a:defRPr/>
+              </a:pPr>
+              <a:endParaRPr lang="ko-KR" altLang="en-US"/>
+            </a:p>
+          </p:txBody>
+        </p:sp>
+        <p:sp>
+          <p:nvSpPr>
+            <p:cNvPr id="8" name="직사각형 7"/>
+            <p:cNvSpPr/>
+            <p:nvPr/>
+          </p:nvSpPr>
+          <p:spPr>
+            <a:xfrm>
+              <a:off x="3262312" y="2977885"/>
+              <a:ext cx="2178844" cy="1143000"/>
+            </a:xfrm>
+            <a:prstGeom prst="rect">
+              <a:avLst/>
+            </a:prstGeom>
+            <a:noFill/>
+            <a:ln w="38100">
+              <a:solidFill>
+                <a:srgbClr val="ff0000"/>
+              </a:solidFill>
+            </a:ln>
+          </p:spPr>
+          <p:style>
+            <a:lnRef idx="2">
+              <a:schemeClr val="accent1">
+                <a:shade val="20000"/>
+              </a:schemeClr>
+            </a:lnRef>
+            <a:fillRef idx="1">
+              <a:schemeClr val="accent1"/>
+            </a:fillRef>
+            <a:effectRef idx="0">
+              <a:schemeClr val="accent1"/>
+            </a:effectRef>
+            <a:fontRef idx="minor">
+              <a:schemeClr val="lt1"/>
+            </a:fontRef>
+          </p:style>
+          <p:txBody>
+            <a:bodyPr anchor="ctr"/>
+            <a:p>
+              <a:pPr lvl="0" algn="ctr">
+                <a:defRPr/>
+              </a:pPr>
+              <a:endParaRPr lang="ko-KR" altLang="en-US"/>
+            </a:p>
+          </p:txBody>
+        </p:sp>
+        <p:sp>
+          <p:nvSpPr>
+            <p:cNvPr id="9" name="직사각형 8"/>
+            <p:cNvSpPr/>
+            <p:nvPr/>
+          </p:nvSpPr>
+          <p:spPr>
+            <a:xfrm>
+              <a:off x="3262312" y="4144697"/>
+              <a:ext cx="2178844" cy="1143000"/>
+            </a:xfrm>
+            <a:prstGeom prst="rect">
+              <a:avLst/>
+            </a:prstGeom>
+            <a:noFill/>
+            <a:ln w="38100">
+              <a:solidFill>
+                <a:srgbClr val="ff0000"/>
+              </a:solidFill>
+            </a:ln>
+          </p:spPr>
+          <p:style>
+            <a:lnRef idx="2">
+              <a:schemeClr val="accent1">
+                <a:shade val="20000"/>
+              </a:schemeClr>
+            </a:lnRef>
+            <a:fillRef idx="1">
+              <a:schemeClr val="accent1"/>
+            </a:fillRef>
+            <a:effectRef idx="0">
+              <a:schemeClr val="accent1"/>
+            </a:effectRef>
+            <a:fontRef idx="minor">
+              <a:schemeClr val="lt1"/>
+            </a:fontRef>
+          </p:style>
+          <p:txBody>
+            <a:bodyPr anchor="ctr"/>
+            <a:p>
+              <a:pPr lvl="0" algn="ctr">
+                <a:defRPr/>
+              </a:pPr>
+              <a:endParaRPr lang="ko-KR" altLang="en-US"/>
+            </a:p>
+          </p:txBody>
+        </p:sp>
+        <p:sp>
+          <p:nvSpPr>
+            <p:cNvPr id="10" name="직사각형 9"/>
+            <p:cNvSpPr/>
+            <p:nvPr/>
+          </p:nvSpPr>
+          <p:spPr>
+            <a:xfrm>
+              <a:off x="3262313" y="5311509"/>
+              <a:ext cx="2178844" cy="601578"/>
+            </a:xfrm>
+            <a:prstGeom prst="rect">
+              <a:avLst/>
+            </a:prstGeom>
+            <a:noFill/>
+            <a:ln w="38100">
+              <a:solidFill>
+                <a:srgbClr val="ff0000"/>
+              </a:solidFill>
+            </a:ln>
+          </p:spPr>
+          <p:style>
+            <a:lnRef idx="2">
+              <a:schemeClr val="accent1">
+                <a:shade val="20000"/>
+              </a:schemeClr>
+            </a:lnRef>
+            <a:fillRef idx="1">
+              <a:schemeClr val="accent1"/>
+            </a:fillRef>
+            <a:effectRef idx="0">
+              <a:schemeClr val="accent1"/>
+            </a:effectRef>
+            <a:fontRef idx="minor">
+              <a:schemeClr val="lt1"/>
+            </a:fontRef>
+          </p:style>
+          <p:txBody>
+            <a:bodyPr anchor="ctr"/>
+            <a:p>
+              <a:pPr lvl="0" algn="ctr">
+                <a:defRPr/>
+              </a:pPr>
+              <a:endParaRPr lang="ko-KR" altLang="en-US"/>
+            </a:p>
+          </p:txBody>
+        </p:sp>
+        <p:cxnSp>
+          <p:nvCxnSpPr>
+            <p:cNvPr id="11" name="화살표 10"/>
+            <p:cNvCxnSpPr>
+              <a:stCxn id="6" idx="3"/>
+            </p:cNvCxnSpPr>
+            <p:nvPr/>
+          </p:nvCxnSpPr>
+          <p:spPr>
+            <a:xfrm>
+              <a:off x="5441157" y="1227666"/>
+              <a:ext cx="873730" cy="0"/>
+            </a:xfrm>
+            <a:prstGeom prst="straightConnector1">
+              <a:avLst/>
+            </a:prstGeom>
+            <a:ln w="28575">
+              <a:solidFill>
+                <a:srgbClr val="ff0000"/>
+              </a:solidFill>
+              <a:tailEnd type="arrow"/>
+            </a:ln>
+          </p:spPr>
+          <p:style>
+            <a:lnRef idx="1">
+              <a:schemeClr val="accent1"/>
+            </a:lnRef>
+            <a:fillRef idx="0">
+              <a:schemeClr val="accent1"/>
+            </a:fillRef>
+            <a:effectRef idx="0">
+              <a:schemeClr val="accent1"/>
+            </a:effectRef>
+            <a:fontRef idx="minor">
+              <a:schemeClr val="tx1"/>
+            </a:fontRef>
+          </p:style>
+        </p:cxnSp>
+        <p:sp>
+          <p:nvSpPr>
+            <p:cNvPr id="12" name="가로 글상자 11"/>
+            <p:cNvSpPr txBox="1"/>
+            <p:nvPr/>
+          </p:nvSpPr>
+          <p:spPr>
+            <a:xfrm>
+              <a:off x="6314887" y="1107110"/>
+              <a:ext cx="701228" cy="241113"/>
+            </a:xfrm>
+            <a:prstGeom prst="rect">
+              <a:avLst/>
+            </a:prstGeom>
+            <a:solidFill>
+              <a:srgbClr val="ffffff"/>
+            </a:solidFill>
+            <a:ln w="28575">
+              <a:solidFill>
+                <a:srgbClr val="ff0000"/>
+              </a:solidFill>
+            </a:ln>
+          </p:spPr>
+          <p:txBody>
+            <a:bodyPr wrap="square">
+              <a:spAutoFit/>
+            </a:bodyPr>
+            <a:p>
+              <a:pPr lvl="0">
+                <a:defRPr/>
+              </a:pPr>
+              <a:r>
+                <a:rPr lang="en-US" altLang="ko-KR" sz="1000"/>
+                <a:t>first page</a:t>
+              </a:r>
+              <a:endParaRPr lang="en-US" altLang="ko-KR" sz="1000"/>
+            </a:p>
+          </p:txBody>
+        </p:sp>
+        <p:cxnSp>
+          <p:nvCxnSpPr>
+            <p:cNvPr id="13" name="화살표 12"/>
+            <p:cNvCxnSpPr/>
+            <p:nvPr/>
+          </p:nvCxnSpPr>
+          <p:spPr>
+            <a:xfrm>
+              <a:off x="5441157" y="2388526"/>
+              <a:ext cx="873730" cy="0"/>
+            </a:xfrm>
+            <a:prstGeom prst="straightConnector1">
+              <a:avLst/>
+            </a:prstGeom>
+            <a:ln w="28575">
+              <a:solidFill>
+                <a:srgbClr val="ff0000"/>
+              </a:solidFill>
+              <a:tailEnd type="arrow"/>
+            </a:ln>
+          </p:spPr>
+          <p:style>
+            <a:lnRef idx="1">
+              <a:schemeClr val="accent1"/>
+            </a:lnRef>
+            <a:fillRef idx="0">
+              <a:schemeClr val="accent1"/>
+            </a:fillRef>
+            <a:effectRef idx="0">
+              <a:schemeClr val="accent1"/>
+            </a:effectRef>
+            <a:fontRef idx="minor">
+              <a:schemeClr val="tx1"/>
+            </a:fontRef>
+          </p:style>
+        </p:cxnSp>
+        <p:sp>
+          <p:nvSpPr>
+            <p:cNvPr id="14" name="가로 글상자 13"/>
+            <p:cNvSpPr txBox="1"/>
+            <p:nvPr/>
+          </p:nvSpPr>
+          <p:spPr>
+            <a:xfrm>
+              <a:off x="6314887" y="2267969"/>
+              <a:ext cx="1348928" cy="241286"/>
+            </a:xfrm>
+            <a:prstGeom prst="rect">
+              <a:avLst/>
+            </a:prstGeom>
+            <a:solidFill>
+              <a:srgbClr val="ffffff"/>
+            </a:solidFill>
+            <a:ln w="28575">
+              <a:solidFill>
+                <a:srgbClr val="ff0000"/>
+              </a:solidFill>
+            </a:ln>
+          </p:spPr>
+          <p:txBody>
+            <a:bodyPr wrap="square">
+              <a:spAutoFit/>
+            </a:bodyPr>
+            <a:p>
+              <a:pPr lvl="0">
+                <a:defRPr/>
+              </a:pPr>
+              <a:r>
+                <a:rPr lang="en-US" altLang="ko-KR" sz="1000"/>
+                <a:t>Service - </a:t>
+              </a:r>
+              <a:r>
+                <a:rPr lang="ko-KR" altLang="en-US" sz="1000"/>
+                <a:t>서비스 소개</a:t>
+              </a:r>
+              <a:endParaRPr lang="ko-KR" altLang="en-US" sz="1000"/>
+            </a:p>
+          </p:txBody>
+        </p:sp>
+        <p:cxnSp>
+          <p:nvCxnSpPr>
+            <p:cNvPr id="15" name="화살표 14"/>
+            <p:cNvCxnSpPr/>
+            <p:nvPr/>
+          </p:nvCxnSpPr>
+          <p:spPr>
+            <a:xfrm>
+              <a:off x="5441157" y="3549558"/>
+              <a:ext cx="873730" cy="0"/>
+            </a:xfrm>
+            <a:prstGeom prst="straightConnector1">
+              <a:avLst/>
+            </a:prstGeom>
+            <a:ln w="28575">
+              <a:solidFill>
+                <a:srgbClr val="ff0000"/>
+              </a:solidFill>
+              <a:tailEnd type="arrow"/>
+            </a:ln>
+          </p:spPr>
+          <p:style>
+            <a:lnRef idx="1">
+              <a:schemeClr val="accent1"/>
+            </a:lnRef>
+            <a:fillRef idx="0">
+              <a:schemeClr val="accent1"/>
+            </a:fillRef>
+            <a:effectRef idx="0">
+              <a:schemeClr val="accent1"/>
+            </a:effectRef>
+            <a:fontRef idx="minor">
+              <a:schemeClr val="tx1"/>
+            </a:fontRef>
+          </p:style>
+        </p:cxnSp>
+        <p:sp>
+          <p:nvSpPr>
+            <p:cNvPr id="16" name="가로 글상자 15"/>
+            <p:cNvSpPr txBox="1"/>
+            <p:nvPr/>
+          </p:nvSpPr>
+          <p:spPr>
+            <a:xfrm>
+              <a:off x="6314887" y="3429000"/>
+              <a:ext cx="1729928" cy="242305"/>
+            </a:xfrm>
+            <a:prstGeom prst="rect">
+              <a:avLst/>
+            </a:prstGeom>
+            <a:solidFill>
+              <a:srgbClr val="ffffff"/>
+            </a:solidFill>
+            <a:ln w="28575">
+              <a:solidFill>
+                <a:srgbClr val="ff0000"/>
+              </a:solidFill>
+            </a:ln>
+          </p:spPr>
+          <p:txBody>
+            <a:bodyPr wrap="square">
+              <a:spAutoFit/>
+            </a:bodyPr>
+            <a:p>
+              <a:pPr lvl="0">
+                <a:defRPr/>
+              </a:pPr>
+              <a:r>
+                <a:rPr lang="en-US" altLang="ko-KR" sz="1000"/>
+                <a:t>Character - Nyxi </a:t>
+              </a:r>
+              <a:r>
+                <a:rPr lang="ko-KR" altLang="en-US" sz="1000"/>
+                <a:t>캐릭터 소개</a:t>
+              </a:r>
+              <a:endParaRPr lang="ko-KR" altLang="en-US" sz="1000"/>
+            </a:p>
+          </p:txBody>
+        </p:sp>
+        <p:cxnSp>
+          <p:nvCxnSpPr>
+            <p:cNvPr id="17" name="화살표 16"/>
+            <p:cNvCxnSpPr/>
+            <p:nvPr/>
+          </p:nvCxnSpPr>
+          <p:spPr>
+            <a:xfrm>
+              <a:off x="5441157" y="4711608"/>
+              <a:ext cx="873730" cy="0"/>
+            </a:xfrm>
+            <a:prstGeom prst="straightConnector1">
+              <a:avLst/>
+            </a:prstGeom>
+            <a:ln w="28575">
+              <a:solidFill>
+                <a:srgbClr val="ff0000"/>
+              </a:solidFill>
+              <a:tailEnd type="arrow"/>
+            </a:ln>
+          </p:spPr>
+          <p:style>
+            <a:lnRef idx="1">
+              <a:schemeClr val="accent1"/>
+            </a:lnRef>
+            <a:fillRef idx="0">
+              <a:schemeClr val="accent1"/>
+            </a:fillRef>
+            <a:effectRef idx="0">
+              <a:schemeClr val="accent1"/>
+            </a:effectRef>
+            <a:fontRef idx="minor">
+              <a:schemeClr val="tx1"/>
+            </a:fontRef>
+          </p:style>
+        </p:cxnSp>
+        <p:sp>
+          <p:nvSpPr>
+            <p:cNvPr id="18" name="가로 글상자 17"/>
+            <p:cNvSpPr txBox="1"/>
+            <p:nvPr/>
+          </p:nvSpPr>
+          <p:spPr>
+            <a:xfrm>
+              <a:off x="6314887" y="4591050"/>
+              <a:ext cx="1253678" cy="242305"/>
+            </a:xfrm>
+            <a:prstGeom prst="rect">
+              <a:avLst/>
+            </a:prstGeom>
+            <a:solidFill>
+              <a:srgbClr val="ffffff"/>
+            </a:solidFill>
+            <a:ln w="28575">
+              <a:solidFill>
+                <a:srgbClr val="ff0000"/>
+              </a:solidFill>
+            </a:ln>
+          </p:spPr>
+          <p:txBody>
+            <a:bodyPr wrap="square">
+              <a:spAutoFit/>
+            </a:bodyPr>
+            <a:p>
+              <a:pPr lvl="0">
+                <a:defRPr/>
+              </a:pPr>
+              <a:r>
+                <a:rPr lang="en-US" altLang="ko-KR" sz="1000"/>
+                <a:t>Contact - </a:t>
+              </a:r>
+              <a:r>
+                <a:rPr lang="ko-KR" altLang="en-US" sz="1000"/>
+                <a:t>문의 메일</a:t>
+              </a:r>
+              <a:endParaRPr lang="ko-KR" altLang="en-US" sz="1000"/>
+            </a:p>
+          </p:txBody>
+        </p:sp>
+        <p:cxnSp>
+          <p:nvCxnSpPr>
+            <p:cNvPr id="19" name="화살표 18"/>
+            <p:cNvCxnSpPr/>
+            <p:nvPr/>
+          </p:nvCxnSpPr>
+          <p:spPr>
+            <a:xfrm>
+              <a:off x="5441157" y="5612298"/>
+              <a:ext cx="873730" cy="0"/>
+            </a:xfrm>
+            <a:prstGeom prst="straightConnector1">
+              <a:avLst/>
+            </a:prstGeom>
+            <a:ln w="28575">
+              <a:solidFill>
+                <a:srgbClr val="ff0000"/>
+              </a:solidFill>
+              <a:tailEnd type="arrow"/>
+            </a:ln>
+          </p:spPr>
+          <p:style>
+            <a:lnRef idx="1">
+              <a:schemeClr val="accent1"/>
+            </a:lnRef>
+            <a:fillRef idx="0">
+              <a:schemeClr val="accent1"/>
+            </a:fillRef>
+            <a:effectRef idx="0">
+              <a:schemeClr val="accent1"/>
+            </a:effectRef>
+            <a:fontRef idx="minor">
+              <a:schemeClr val="tx1"/>
+            </a:fontRef>
+          </p:style>
+        </p:cxnSp>
+        <p:sp>
+          <p:nvSpPr>
+            <p:cNvPr id="20" name="가로 글상자 19"/>
+            <p:cNvSpPr txBox="1"/>
+            <p:nvPr/>
+          </p:nvSpPr>
+          <p:spPr>
+            <a:xfrm>
+              <a:off x="6314887" y="5491740"/>
+              <a:ext cx="2187128" cy="236965"/>
+            </a:xfrm>
+            <a:prstGeom prst="rect">
+              <a:avLst/>
+            </a:prstGeom>
+            <a:solidFill>
+              <a:srgbClr val="ffffff"/>
+            </a:solidFill>
+            <a:ln w="28575">
+              <a:solidFill>
+                <a:srgbClr val="ff0000"/>
+              </a:solidFill>
+            </a:ln>
+          </p:spPr>
+          <p:txBody>
+            <a:bodyPr wrap="square">
+              <a:spAutoFit/>
+            </a:bodyPr>
+            <a:p>
+              <a:pPr lvl="0">
+                <a:defRPr/>
+              </a:pPr>
+              <a:r>
+                <a:rPr lang="ko-KR" altLang="en-US" sz="1000"/>
+                <a:t>바텀</a:t>
+              </a:r>
+              <a:r>
+                <a:rPr lang="en-US" altLang="ko-KR" sz="1000"/>
+                <a:t>(</a:t>
+              </a:r>
+              <a:r>
+                <a:rPr lang="ko-KR" altLang="en-US" sz="1000"/>
+                <a:t>저작권 및 개발자 연락처 정보</a:t>
+              </a:r>
+              <a:r>
+                <a:rPr lang="en-US" altLang="ko-KR" sz="1000"/>
+                <a:t>)</a:t>
+              </a:r>
+              <a:endParaRPr lang="en-US" altLang="ko-KR" sz="1000"/>
+            </a:p>
+          </p:txBody>
+        </p:sp>
+      </p:grpSp>
+    </p:spTree>
+    <p:extLst>
+      <p:ext uri="{BB962C8B-B14F-4D97-AF65-F5344CB8AC3E}">
+        <p14:creationId xmlns:p14="http://schemas.microsoft.com/office/powerpoint/2010/main" val="2689129123"/>
+      </p:ext>
+    </p:extLst>
+  </p:cSld>
+  <p:clrMapOvr>
+    <a:masterClrMapping/>
+  </p:clrMapOvr>
+</p:sld>
+</file>
+
+<file path=ppt/slides/slide3.xml><?xml version="1.0" encoding="utf-8"?>
+<p:sld xmlns:r="http://schemas.openxmlformats.org/officeDocument/2006/relationships" xmlns:c="http://schemas.openxmlformats.org/drawingml/2006/chart" xmlns:a="http://schemas.openxmlformats.org/drawingml/2006/main" xmlns:dgm="http://schemas.openxmlformats.org/drawingml/2006/diagram" xmlns:dsp="http://schemas.microsoft.com/office/drawing/2008/diagram" xmlns:p="http://schemas.openxmlformats.org/presentationml/2006/main">
+  <p:cSld>
+    <p:spTree>
+      <p:nvGrpSpPr>
+        <p:cNvPr id="1" name=""/>
+        <p:cNvGrpSpPr/>
+        <p:nvPr/>
+      </p:nvGrpSpPr>
+      <p:grpSpPr>
+        <a:xfrm>
+          <a:off x="0" y="0"/>
+          <a:ext cx="0" cy="0"/>
+          <a:chOff x="0" y="0"/>
+          <a:chExt cx="0" cy="0"/>
+        </a:xfrm>
+      </p:grpSpPr>
+      <p:sp>
+        <p:nvSpPr>
+          <p:cNvPr id="4" name="가로 글상자 3"/>
+          <p:cNvSpPr txBox="1"/>
+          <p:nvPr/>
+        </p:nvSpPr>
+        <p:spPr>
+          <a:xfrm>
+            <a:off x="205015" y="204305"/>
             <a:ext cx="4030363" cy="520071"/>
           </a:xfrm>
           <a:prstGeom prst="rect">
@@ -3877,7 +4591,7 @@
 </p:sld>
 </file>
 
-<file path=ppt/slides/slide3.xml><?xml version="1.0" encoding="utf-8"?>
+<file path=ppt/slides/slide4.xml><?xml version="1.0" encoding="utf-8"?>
 <p:sld xmlns:r="http://schemas.openxmlformats.org/officeDocument/2006/relationships" xmlns:c="http://schemas.openxmlformats.org/drawingml/2006/chart" xmlns:a="http://schemas.openxmlformats.org/drawingml/2006/main" xmlns:dgm="http://schemas.openxmlformats.org/drawingml/2006/diagram" xmlns:dsp="http://schemas.microsoft.com/office/drawing/2008/diagram" xmlns:p="http://schemas.openxmlformats.org/presentationml/2006/main">
   <p:cSld>
     <p:spTree>
@@ -3903,7 +4617,7 @@
         <p:spPr>
           <a:xfrm>
             <a:off x="205015" y="204305"/>
-            <a:ext cx="4030363" cy="520071"/>
+            <a:ext cx="4192288" cy="517690"/>
           </a:xfrm>
           <a:prstGeom prst="rect">
             <a:avLst/>
@@ -3925,7 +4639,11 @@
               <a:rPr lang="ko-KR" altLang="en-US" sz="2800"/>
               <a:t>수정 사항</a:t>
             </a:r>
-            <a:endParaRPr lang="ko-KR" altLang="en-US" sz="2800"/>
+            <a:r>
+              <a:rPr lang="en-US" altLang="ko-KR" sz="2800"/>
+              <a:t>(1)</a:t>
+            </a:r>
+            <a:endParaRPr lang="en-US" altLang="ko-KR" sz="2800"/>
           </a:p>
         </p:txBody>
       </p:sp>
@@ -4001,10 +4719,1730 @@
           </a:p>
         </p:txBody>
       </p:sp>
+      <p:cxnSp>
+        <p:nvCxnSpPr>
+          <p:cNvPr id="7" name="화살표 6"/>
+          <p:cNvCxnSpPr>
+            <a:stCxn id="6" idx="3"/>
+            <a:endCxn id="8" idx="1"/>
+          </p:cNvCxnSpPr>
+          <p:nvPr/>
+        </p:nvCxnSpPr>
+        <p:spPr>
+          <a:xfrm flipV="1">
+            <a:off x="2488406" y="609946"/>
+            <a:ext cx="2074933" cy="896194"/>
+          </a:xfrm>
+          <a:prstGeom prst="straightConnector1">
+            <a:avLst/>
+          </a:prstGeom>
+          <a:ln w="28575">
+            <a:solidFill>
+              <a:srgbClr val="ff0000"/>
+            </a:solidFill>
+            <a:tailEnd type="arrow"/>
+          </a:ln>
+        </p:spPr>
+        <p:style>
+          <a:lnRef idx="1">
+            <a:schemeClr val="accent1"/>
+          </a:lnRef>
+          <a:fillRef idx="0">
+            <a:schemeClr val="accent1"/>
+          </a:fillRef>
+          <a:effectRef idx="0">
+            <a:schemeClr val="accent1"/>
+          </a:effectRef>
+          <a:fontRef idx="minor">
+            <a:schemeClr val="tx1"/>
+          </a:fontRef>
+        </p:style>
+      </p:cxnSp>
+      <p:sp>
+        <p:nvSpPr>
+          <p:cNvPr id="8" name="가로 글상자 7"/>
+          <p:cNvSpPr txBox="1"/>
+          <p:nvPr/>
+        </p:nvSpPr>
+        <p:spPr>
+          <a:xfrm>
+            <a:off x="4563340" y="259772"/>
+            <a:ext cx="4198770" cy="700348"/>
+          </a:xfrm>
+          <a:prstGeom prst="rect">
+            <a:avLst/>
+          </a:prstGeom>
+          <a:solidFill>
+            <a:srgbClr val="ffffff"/>
+          </a:solidFill>
+          <a:ln w="28575">
+            <a:solidFill>
+              <a:srgbClr val="ff0000"/>
+            </a:solidFill>
+          </a:ln>
+        </p:spPr>
+        <p:txBody>
+          <a:bodyPr wrap="square">
+            <a:spAutoFit/>
+          </a:bodyPr>
+          <a:p>
+            <a:pPr lvl="0">
+              <a:defRPr/>
+            </a:pPr>
+            <a:r>
+              <a:rPr lang="ko-KR" altLang="en-US" sz="1000"/>
+              <a:t>로고 필요</a:t>
+            </a:r>
+            <a:endParaRPr lang="ko-KR" altLang="en-US" sz="1000"/>
+          </a:p>
+          <a:p>
+            <a:pPr lvl="0">
+              <a:defRPr/>
+            </a:pPr>
+            <a:endParaRPr lang="ko-KR" altLang="en-US" sz="1000"/>
+          </a:p>
+          <a:p>
+            <a:pPr lvl="0">
+              <a:defRPr/>
+            </a:pPr>
+            <a:r>
+              <a:rPr lang="en-US" altLang="ko-KR" sz="1000"/>
+              <a:t>-</a:t>
+            </a:r>
+            <a:r>
+              <a:rPr lang="ko-KR" altLang="en-US" sz="1000"/>
+              <a:t> </a:t>
+            </a:r>
+            <a:r>
+              <a:rPr lang="en-US" altLang="ko-KR" sz="1000"/>
+              <a:t>Nyxi</a:t>
+            </a:r>
+            <a:r>
+              <a:rPr lang="ko-KR" altLang="en-US" sz="1000"/>
+              <a:t>의 머리때의 초승달을 활용한 로고를 외부 </a:t>
+            </a:r>
+            <a:r>
+              <a:rPr lang="en-US" altLang="ko-KR" sz="1000"/>
+              <a:t>AI</a:t>
+            </a:r>
+            <a:r>
+              <a:rPr lang="ko-KR" altLang="en-US" sz="1000"/>
+              <a:t>를 활용해 사용할 예정</a:t>
+            </a:r>
+            <a:endParaRPr lang="ko-KR" altLang="en-US" sz="1000"/>
+          </a:p>
+          <a:p>
+            <a:pPr lvl="0">
+              <a:defRPr/>
+            </a:pPr>
+            <a:r>
+              <a:rPr lang="en-US" altLang="ko-KR" sz="1000"/>
+              <a:t>-</a:t>
+            </a:r>
+            <a:r>
+              <a:rPr lang="ko-KR" altLang="en-US" sz="1000"/>
+              <a:t> 왼쪽의 글씨는 </a:t>
+            </a:r>
+            <a:r>
+              <a:rPr lang="en-US" altLang="ko-KR" sz="1000"/>
+              <a:t>‘Studio Nx’</a:t>
+            </a:r>
+            <a:r>
+              <a:rPr lang="ko-KR" altLang="en-US" sz="1000"/>
+              <a:t>로 고침</a:t>
+            </a:r>
+            <a:r>
+              <a:rPr lang="en-US" altLang="ko-KR" sz="1000"/>
+              <a:t>.</a:t>
+            </a:r>
+            <a:endParaRPr lang="ko-KR" altLang="en-US" sz="1000"/>
+          </a:p>
+        </p:txBody>
+      </p:sp>
+      <p:grpSp>
+        <p:nvGrpSpPr>
+          <p:cNvPr id="11" name=""/>
+          <p:cNvGrpSpPr/>
+          <p:nvPr/>
+        </p:nvGrpSpPr>
+        <p:grpSpPr>
+          <a:xfrm rot="0">
+            <a:off x="5796179" y="1377336"/>
+            <a:ext cx="4649932" cy="971250"/>
+            <a:chOff x="5796179" y="1377336"/>
+            <a:chExt cx="4649932" cy="971250"/>
+          </a:xfrm>
+        </p:grpSpPr>
+        <p:sp>
+          <p:nvSpPr>
+            <p:cNvPr id="9" name="직사각형 8"/>
+            <p:cNvSpPr/>
+            <p:nvPr/>
+          </p:nvSpPr>
+          <p:spPr>
+            <a:xfrm>
+              <a:off x="5796179" y="1377336"/>
+              <a:ext cx="4649932" cy="257608"/>
+            </a:xfrm>
+            <a:prstGeom prst="rect">
+              <a:avLst/>
+            </a:prstGeom>
+            <a:noFill/>
+            <a:ln w="38100">
+              <a:solidFill>
+                <a:srgbClr val="ff0000"/>
+              </a:solidFill>
+            </a:ln>
+          </p:spPr>
+          <p:style>
+            <a:lnRef idx="2">
+              <a:schemeClr val="accent1">
+                <a:shade val="20000"/>
+              </a:schemeClr>
+            </a:lnRef>
+            <a:fillRef idx="1">
+              <a:schemeClr val="accent1"/>
+            </a:fillRef>
+            <a:effectRef idx="0">
+              <a:schemeClr val="accent1"/>
+            </a:effectRef>
+            <a:fontRef idx="minor">
+              <a:schemeClr val="lt1"/>
+            </a:fontRef>
+          </p:style>
+          <p:txBody>
+            <a:bodyPr anchor="ctr"/>
+            <a:p>
+              <a:pPr lvl="0" algn="ctr">
+                <a:defRPr/>
+              </a:pPr>
+              <a:endParaRPr lang="ko-KR" altLang="en-US"/>
+            </a:p>
+          </p:txBody>
+        </p:sp>
+        <p:cxnSp>
+          <p:nvCxnSpPr>
+            <p:cNvPr id="10" name="화살표 9"/>
+            <p:cNvCxnSpPr>
+              <a:stCxn id="9" idx="2"/>
+            </p:cNvCxnSpPr>
+            <p:nvPr/>
+          </p:nvCxnSpPr>
+          <p:spPr>
+            <a:xfrm rot="16200000" flipH="1">
+              <a:off x="7764325" y="1991766"/>
+              <a:ext cx="713642" cy="0"/>
+            </a:xfrm>
+            <a:prstGeom prst="straightConnector1">
+              <a:avLst/>
+            </a:prstGeom>
+            <a:ln w="28575">
+              <a:solidFill>
+                <a:srgbClr val="ff0000"/>
+              </a:solidFill>
+              <a:tailEnd type="arrow"/>
+            </a:ln>
+          </p:spPr>
+          <p:style>
+            <a:lnRef idx="1">
+              <a:schemeClr val="accent1"/>
+            </a:lnRef>
+            <a:fillRef idx="0">
+              <a:schemeClr val="accent1"/>
+            </a:fillRef>
+            <a:effectRef idx="0">
+              <a:schemeClr val="accent1"/>
+            </a:effectRef>
+            <a:fontRef idx="minor">
+              <a:schemeClr val="tx1"/>
+            </a:fontRef>
+          </p:style>
+        </p:cxnSp>
+      </p:grpSp>
+      <p:sp>
+        <p:nvSpPr>
+          <p:cNvPr id="12" name="가로 글상자 11"/>
+          <p:cNvSpPr txBox="1"/>
+          <p:nvPr/>
+        </p:nvSpPr>
+        <p:spPr>
+          <a:xfrm>
+            <a:off x="6021760" y="2348587"/>
+            <a:ext cx="4198770" cy="2069108"/>
+          </a:xfrm>
+          <a:prstGeom prst="rect">
+            <a:avLst/>
+          </a:prstGeom>
+          <a:solidFill>
+            <a:srgbClr val="ffffff"/>
+          </a:solidFill>
+          <a:ln w="28575">
+            <a:solidFill>
+              <a:srgbClr val="ff0000"/>
+            </a:solidFill>
+          </a:ln>
+        </p:spPr>
+        <p:txBody>
+          <a:bodyPr wrap="square">
+            <a:spAutoFit/>
+          </a:bodyPr>
+          <a:p>
+            <a:pPr lvl="0">
+              <a:defRPr/>
+            </a:pPr>
+            <a:r>
+              <a:rPr lang="ko-KR" altLang="en-US" sz="1000"/>
+              <a:t>아래의 앵커로서 활용</a:t>
+            </a:r>
+            <a:r>
+              <a:rPr lang="en-US" altLang="ko-KR" sz="1000"/>
+              <a:t>.</a:t>
+            </a:r>
+            <a:r>
+              <a:rPr lang="ko-KR" altLang="en-US" sz="1000"/>
+              <a:t> 클릭하면 아래의 앵커로 자동 스크롤됨</a:t>
+            </a:r>
+            <a:r>
+              <a:rPr lang="en-US" altLang="ko-KR" sz="1000"/>
+              <a:t>.</a:t>
+            </a:r>
+            <a:endParaRPr lang="en-US" altLang="ko-KR" sz="1000"/>
+          </a:p>
+          <a:p>
+            <a:pPr lvl="0">
+              <a:defRPr/>
+            </a:pPr>
+            <a:endParaRPr lang="en-US" altLang="ko-KR" sz="1000"/>
+          </a:p>
+          <a:p>
+            <a:pPr lvl="0">
+              <a:defRPr/>
+            </a:pPr>
+            <a:r>
+              <a:rPr lang="ko-KR" altLang="en-US" sz="1000"/>
+              <a:t>해당 화면 아래의 내용은 다음과 같이 구성될 것이다</a:t>
+            </a:r>
+            <a:r>
+              <a:rPr lang="en-US" altLang="ko-KR" sz="1000"/>
+              <a:t>.</a:t>
+            </a:r>
+            <a:endParaRPr lang="en-US" altLang="ko-KR" sz="1000"/>
+          </a:p>
+          <a:p>
+            <a:pPr lvl="0">
+              <a:defRPr/>
+            </a:pPr>
+            <a:endParaRPr lang="en-US" altLang="ko-KR" sz="1000"/>
+          </a:p>
+          <a:p>
+            <a:pPr lvl="0">
+              <a:defRPr/>
+            </a:pPr>
+            <a:r>
+              <a:rPr lang="en-US" altLang="ko-KR" sz="1000"/>
+              <a:t>1)</a:t>
+            </a:r>
+            <a:r>
+              <a:rPr lang="ko-KR" altLang="en-US" sz="1000"/>
+              <a:t> 서비스 소개</a:t>
+            </a:r>
+            <a:r>
+              <a:rPr lang="en-US" altLang="ko-KR" sz="1000"/>
+              <a:t>(Service)</a:t>
+            </a:r>
+            <a:endParaRPr lang="en-US" altLang="ko-KR" sz="1000"/>
+          </a:p>
+          <a:p>
+            <a:pPr lvl="0">
+              <a:defRPr/>
+            </a:pPr>
+            <a:r>
+              <a:rPr lang="en-US" altLang="ko-KR" sz="1000"/>
+              <a:t>2) </a:t>
+            </a:r>
+            <a:r>
+              <a:rPr lang="ko-KR" altLang="en-US" sz="1000"/>
+              <a:t>캐릭터 </a:t>
+            </a:r>
+            <a:r>
+              <a:rPr lang="en-US" altLang="ko-KR" sz="1000"/>
+              <a:t>Nyxi</a:t>
+            </a:r>
+            <a:r>
+              <a:rPr lang="ko-KR" altLang="en-US" sz="1000"/>
+              <a:t> 소개</a:t>
+            </a:r>
+            <a:r>
+              <a:rPr lang="en-US" altLang="ko-KR" sz="1000"/>
+              <a:t>(Character)</a:t>
+            </a:r>
+            <a:endParaRPr lang="en-US" altLang="ko-KR" sz="1000"/>
+          </a:p>
+          <a:p>
+            <a:pPr lvl="0">
+              <a:defRPr/>
+            </a:pPr>
+            <a:r>
+              <a:rPr lang="en-US" altLang="ko-KR" sz="1000"/>
+              <a:t>3) </a:t>
+            </a:r>
+            <a:r>
+              <a:rPr lang="ko-KR" altLang="en-US" sz="1000"/>
+              <a:t>기능</a:t>
+            </a:r>
+            <a:r>
+              <a:rPr lang="en-US" altLang="ko-KR" sz="1000"/>
+              <a:t>(feature)</a:t>
+            </a:r>
+            <a:endParaRPr lang="en-US" altLang="ko-KR" sz="1000"/>
+          </a:p>
+          <a:p>
+            <a:pPr lvl="0">
+              <a:defRPr/>
+            </a:pPr>
+            <a:r>
+              <a:rPr lang="en-US" altLang="ko-KR" sz="1000"/>
+              <a:t>4)</a:t>
+            </a:r>
+            <a:r>
+              <a:rPr lang="ko-KR" altLang="en-US" sz="1000"/>
+              <a:t> 개발자 노트</a:t>
+            </a:r>
+            <a:r>
+              <a:rPr lang="en-US" altLang="ko-KR" sz="1000"/>
+              <a:t>(Development)</a:t>
+            </a:r>
+            <a:endParaRPr lang="en-US" altLang="ko-KR" sz="1000"/>
+          </a:p>
+          <a:p>
+            <a:pPr lvl="0">
+              <a:defRPr/>
+            </a:pPr>
+            <a:r>
+              <a:rPr lang="en-US" altLang="ko-KR" sz="1000"/>
+              <a:t>5)</a:t>
+            </a:r>
+            <a:r>
+              <a:rPr lang="ko-KR" altLang="en-US" sz="1000"/>
+              <a:t> 문의</a:t>
+            </a:r>
+            <a:r>
+              <a:rPr lang="en-US" altLang="ko-KR" sz="1000"/>
+              <a:t>(Contact)</a:t>
+            </a:r>
+            <a:endParaRPr lang="en-US" altLang="ko-KR" sz="1000"/>
+          </a:p>
+          <a:p>
+            <a:pPr lvl="0">
+              <a:defRPr/>
+            </a:pPr>
+            <a:r>
+              <a:rPr lang="en-US" altLang="ko-KR" sz="1000"/>
+              <a:t>6)</a:t>
+            </a:r>
+            <a:r>
+              <a:rPr lang="ko-KR" altLang="en-US" sz="1000"/>
+              <a:t> </a:t>
+            </a:r>
+            <a:r>
+              <a:rPr lang="en-US" altLang="ko-KR" sz="1000"/>
+              <a:t>&lt;</a:t>
+            </a:r>
+            <a:r>
+              <a:rPr lang="ko-KR" altLang="en-US" sz="1000"/>
+              <a:t>앵커 </a:t>
+            </a:r>
+            <a:r>
+              <a:rPr lang="en-US" altLang="ko-KR" sz="1000"/>
+              <a:t>X&gt; </a:t>
+            </a:r>
+            <a:r>
+              <a:rPr lang="ko-KR" altLang="en-US" sz="1000"/>
+              <a:t>바텀</a:t>
+            </a:r>
+            <a:r>
+              <a:rPr lang="en-US" altLang="ko-KR" sz="1000"/>
+              <a:t>(</a:t>
+            </a:r>
+            <a:r>
+              <a:rPr lang="ko-KR" altLang="en-US" sz="1000"/>
+              <a:t>연락처 및 저작권 등</a:t>
+            </a:r>
+            <a:r>
+              <a:rPr lang="en-US" altLang="ko-KR" sz="1000"/>
+              <a:t>)</a:t>
+            </a:r>
+            <a:endParaRPr lang="en-US" altLang="ko-KR" sz="1000"/>
+          </a:p>
+          <a:p>
+            <a:pPr lvl="0">
+              <a:defRPr/>
+            </a:pPr>
+            <a:endParaRPr lang="en-US" altLang="ko-KR" sz="1000"/>
+          </a:p>
+          <a:p>
+            <a:pPr lvl="0">
+              <a:defRPr/>
+            </a:pPr>
+            <a:r>
+              <a:rPr lang="ko-KR" altLang="en-US" sz="1000"/>
+              <a:t>이후 두 번째 페이지부터는 앵커는 각 제목의 첫 글자를 따서</a:t>
+            </a:r>
+            <a:r>
+              <a:rPr lang="en-US" altLang="ko-KR" sz="1000"/>
+              <a:t>(</a:t>
+            </a:r>
+            <a:r>
+              <a:rPr lang="ko-KR" altLang="en-US" sz="1000"/>
+              <a:t>같으면 두 번째까지</a:t>
+            </a:r>
+            <a:r>
+              <a:rPr lang="en-US" altLang="ko-KR" sz="1000"/>
+              <a:t>)</a:t>
+            </a:r>
+            <a:r>
+              <a:rPr lang="ko-KR" altLang="en-US" sz="1000"/>
+              <a:t> </a:t>
+            </a:r>
+            <a:r>
+              <a:rPr lang="en-US" altLang="ko-KR" sz="1000"/>
+              <a:t>S, Ch, F, D, Co</a:t>
+            </a:r>
+            <a:r>
+              <a:rPr lang="ko-KR" altLang="en-US" sz="1000"/>
+              <a:t>를 세로로 노란색의 네모 위치에 놓을 것</a:t>
+            </a:r>
+            <a:r>
+              <a:rPr lang="en-US" altLang="ko-KR" sz="1000"/>
+              <a:t>.</a:t>
+            </a:r>
+            <a:endParaRPr lang="en-US" altLang="ko-KR" sz="1000"/>
+          </a:p>
+        </p:txBody>
+      </p:sp>
+      <p:grpSp>
+        <p:nvGrpSpPr>
+          <p:cNvPr id="13" name="그룹 12"/>
+          <p:cNvGrpSpPr/>
+          <p:nvPr/>
+        </p:nvGrpSpPr>
+        <p:grpSpPr>
+          <a:xfrm rot="0">
+            <a:off x="10597899" y="1377336"/>
+            <a:ext cx="1086462" cy="933563"/>
+            <a:chOff x="5796179" y="1377336"/>
+            <a:chExt cx="1086462" cy="933563"/>
+          </a:xfrm>
+        </p:grpSpPr>
+        <p:sp>
+          <p:nvSpPr>
+            <p:cNvPr id="14" name="직사각형 8"/>
+            <p:cNvSpPr/>
+            <p:nvPr/>
+          </p:nvSpPr>
+          <p:spPr>
+            <a:xfrm>
+              <a:off x="5796179" y="1377336"/>
+              <a:ext cx="1086462" cy="257608"/>
+            </a:xfrm>
+            <a:prstGeom prst="rect">
+              <a:avLst/>
+            </a:prstGeom>
+            <a:noFill/>
+            <a:ln w="38100">
+              <a:solidFill>
+                <a:srgbClr val="ff0000"/>
+              </a:solidFill>
+            </a:ln>
+          </p:spPr>
+          <p:style>
+            <a:lnRef idx="2">
+              <a:schemeClr val="accent1">
+                <a:shade val="20000"/>
+              </a:schemeClr>
+            </a:lnRef>
+            <a:fillRef idx="1">
+              <a:schemeClr val="accent1"/>
+            </a:fillRef>
+            <a:effectRef idx="0">
+              <a:schemeClr val="accent1"/>
+            </a:effectRef>
+            <a:fontRef idx="minor">
+              <a:schemeClr val="lt1"/>
+            </a:fontRef>
+          </p:style>
+          <p:txBody>
+            <a:bodyPr anchor="ctr"/>
+            <a:p>
+              <a:pPr lvl="0" algn="ctr">
+                <a:defRPr/>
+              </a:pPr>
+              <a:endParaRPr lang="ko-KR" altLang="en-US"/>
+            </a:p>
+          </p:txBody>
+        </p:sp>
+        <p:cxnSp>
+          <p:nvCxnSpPr>
+            <p:cNvPr id="15" name="화살표 9"/>
+            <p:cNvCxnSpPr>
+              <a:stCxn id="14" idx="2"/>
+            </p:cNvCxnSpPr>
+            <p:nvPr/>
+          </p:nvCxnSpPr>
+          <p:spPr>
+            <a:xfrm rot="16200000" flipH="1">
+              <a:off x="6001429" y="1972922"/>
+              <a:ext cx="675955" cy="0"/>
+            </a:xfrm>
+            <a:prstGeom prst="straightConnector1">
+              <a:avLst/>
+            </a:prstGeom>
+            <a:ln w="28575">
+              <a:solidFill>
+                <a:srgbClr val="ff0000"/>
+              </a:solidFill>
+              <a:tailEnd type="arrow"/>
+            </a:ln>
+          </p:spPr>
+          <p:style>
+            <a:lnRef idx="1">
+              <a:schemeClr val="accent1"/>
+            </a:lnRef>
+            <a:fillRef idx="0">
+              <a:schemeClr val="accent1"/>
+            </a:fillRef>
+            <a:effectRef idx="0">
+              <a:schemeClr val="accent1"/>
+            </a:effectRef>
+            <a:fontRef idx="minor">
+              <a:schemeClr val="tx1"/>
+            </a:fontRef>
+          </p:style>
+        </p:cxnSp>
+      </p:grpSp>
+      <p:sp>
+        <p:nvSpPr>
+          <p:cNvPr id="16" name="가로 글상자 15"/>
+          <p:cNvSpPr txBox="1"/>
+          <p:nvPr/>
+        </p:nvSpPr>
+        <p:spPr>
+          <a:xfrm>
+            <a:off x="10445280" y="2348587"/>
+            <a:ext cx="1503754" cy="697508"/>
+          </a:xfrm>
+          <a:prstGeom prst="rect">
+            <a:avLst/>
+          </a:prstGeom>
+          <a:solidFill>
+            <a:srgbClr val="ffffff"/>
+          </a:solidFill>
+          <a:ln w="28575">
+            <a:solidFill>
+              <a:srgbClr val="ff0000"/>
+            </a:solidFill>
+          </a:ln>
+        </p:spPr>
+        <p:txBody>
+          <a:bodyPr wrap="square">
+            <a:spAutoFit/>
+          </a:bodyPr>
+          <a:p>
+            <a:pPr lvl="0">
+              <a:defRPr/>
+            </a:pPr>
+            <a:r>
+              <a:rPr lang="ko-KR" altLang="en-US" sz="1000"/>
+              <a:t>버튼을 두 개로 함</a:t>
+            </a:r>
+            <a:r>
+              <a:rPr lang="en-US" altLang="ko-KR" sz="1000"/>
+              <a:t>.</a:t>
+            </a:r>
+            <a:endParaRPr lang="en-US" altLang="ko-KR" sz="1000"/>
+          </a:p>
+          <a:p>
+            <a:pPr lvl="0">
+              <a:defRPr/>
+            </a:pPr>
+            <a:endParaRPr lang="en-US" altLang="ko-KR" sz="1000"/>
+          </a:p>
+          <a:p>
+            <a:pPr lvl="0">
+              <a:defRPr/>
+            </a:pPr>
+            <a:r>
+              <a:rPr lang="en-US" altLang="ko-KR" sz="1000"/>
+              <a:t>:</a:t>
+            </a:r>
+            <a:r>
+              <a:rPr lang="ko-KR" altLang="en-US" sz="1000"/>
+              <a:t> </a:t>
+            </a:r>
+            <a:r>
+              <a:rPr lang="en-US" altLang="ko-KR" sz="1000"/>
+              <a:t>Sign In -</a:t>
+            </a:r>
+            <a:r>
+              <a:rPr lang="ko-KR" altLang="en-US" sz="1000"/>
+              <a:t> 로그인 화면</a:t>
+            </a:r>
+            <a:endParaRPr lang="ko-KR" altLang="en-US" sz="1000"/>
+          </a:p>
+          <a:p>
+            <a:pPr lvl="0">
+              <a:defRPr/>
+            </a:pPr>
+            <a:r>
+              <a:rPr lang="en-US" altLang="ko-KR" sz="1000"/>
+              <a:t>:</a:t>
+            </a:r>
+            <a:r>
+              <a:rPr lang="ko-KR" altLang="en-US" sz="1000"/>
+              <a:t> </a:t>
+            </a:r>
+            <a:r>
+              <a:rPr lang="en-US" altLang="ko-KR" sz="1000"/>
+              <a:t>Join Us - </a:t>
+            </a:r>
+            <a:r>
+              <a:rPr lang="ko-KR" altLang="en-US" sz="1000"/>
+              <a:t>회원가입 화면</a:t>
+            </a:r>
+            <a:endParaRPr lang="ko-KR" altLang="en-US" sz="1000"/>
+          </a:p>
+        </p:txBody>
+      </p:sp>
+      <p:grpSp>
+        <p:nvGrpSpPr>
+          <p:cNvPr id="18" name="그룹 17"/>
+          <p:cNvGrpSpPr/>
+          <p:nvPr/>
+        </p:nvGrpSpPr>
+        <p:grpSpPr>
+          <a:xfrm rot="0">
+            <a:off x="1528979" y="2052161"/>
+            <a:ext cx="4567021" cy="4200957"/>
+            <a:chOff x="5796179" y="1377336"/>
+            <a:chExt cx="4567021" cy="4200957"/>
+          </a:xfrm>
+        </p:grpSpPr>
+        <p:sp>
+          <p:nvSpPr>
+            <p:cNvPr id="19" name="직사각형 8"/>
+            <p:cNvSpPr/>
+            <p:nvPr/>
+          </p:nvSpPr>
+          <p:spPr>
+            <a:xfrm>
+              <a:off x="5796179" y="1377336"/>
+              <a:ext cx="3234386" cy="4200957"/>
+            </a:xfrm>
+            <a:prstGeom prst="rect">
+              <a:avLst/>
+            </a:prstGeom>
+            <a:noFill/>
+            <a:ln w="38100">
+              <a:solidFill>
+                <a:srgbClr val="ff0000"/>
+              </a:solidFill>
+            </a:ln>
+          </p:spPr>
+          <p:style>
+            <a:lnRef idx="2">
+              <a:schemeClr val="accent1">
+                <a:shade val="20000"/>
+              </a:schemeClr>
+            </a:lnRef>
+            <a:fillRef idx="1">
+              <a:schemeClr val="accent1"/>
+            </a:fillRef>
+            <a:effectRef idx="0">
+              <a:schemeClr val="accent1"/>
+            </a:effectRef>
+            <a:fontRef idx="minor">
+              <a:schemeClr val="lt1"/>
+            </a:fontRef>
+          </p:style>
+          <p:txBody>
+            <a:bodyPr anchor="ctr"/>
+            <a:p>
+              <a:pPr lvl="0" algn="ctr">
+                <a:defRPr/>
+              </a:pPr>
+              <a:endParaRPr lang="ko-KR" altLang="en-US"/>
+            </a:p>
+          </p:txBody>
+        </p:sp>
+        <p:cxnSp>
+          <p:nvCxnSpPr>
+            <p:cNvPr id="20" name="화살표 9"/>
+            <p:cNvCxnSpPr>
+              <a:stCxn id="19" idx="3"/>
+            </p:cNvCxnSpPr>
+            <p:nvPr/>
+          </p:nvCxnSpPr>
+          <p:spPr>
+            <a:xfrm>
+              <a:off x="9030564" y="3477814"/>
+              <a:ext cx="1332636" cy="1114686"/>
+            </a:xfrm>
+            <a:prstGeom prst="straightConnector1">
+              <a:avLst/>
+            </a:prstGeom>
+            <a:ln w="28575">
+              <a:solidFill>
+                <a:srgbClr val="ff0000"/>
+              </a:solidFill>
+              <a:tailEnd type="arrow"/>
+            </a:ln>
+          </p:spPr>
+          <p:style>
+            <a:lnRef idx="1">
+              <a:schemeClr val="accent1"/>
+            </a:lnRef>
+            <a:fillRef idx="0">
+              <a:schemeClr val="accent1"/>
+            </a:fillRef>
+            <a:effectRef idx="0">
+              <a:schemeClr val="accent1"/>
+            </a:effectRef>
+            <a:fontRef idx="minor">
+              <a:schemeClr val="tx1"/>
+            </a:fontRef>
+          </p:style>
+        </p:cxnSp>
+      </p:grpSp>
+      <p:sp>
+        <p:nvSpPr>
+          <p:cNvPr id="21" name="가로 글상자 20"/>
+          <p:cNvSpPr txBox="1"/>
+          <p:nvPr/>
+        </p:nvSpPr>
+        <p:spPr>
+          <a:xfrm>
+            <a:off x="6096000" y="4524685"/>
+            <a:ext cx="4456505" cy="1302710"/>
+          </a:xfrm>
+          <a:prstGeom prst="rect">
+            <a:avLst/>
+          </a:prstGeom>
+          <a:solidFill>
+            <a:srgbClr val="ffffff"/>
+          </a:solidFill>
+          <a:ln w="28575">
+            <a:solidFill>
+              <a:srgbClr val="ff0000"/>
+            </a:solidFill>
+          </a:ln>
+        </p:spPr>
+        <p:txBody>
+          <a:bodyPr wrap="square">
+            <a:spAutoFit/>
+          </a:bodyPr>
+          <a:p>
+            <a:pPr lvl="0">
+              <a:defRPr/>
+            </a:pPr>
+            <a:r>
+              <a:rPr lang="ko-KR" altLang="en-US" sz="1000"/>
+              <a:t>해당 서비스에 맞는 영어 카피</a:t>
+            </a:r>
+            <a:endParaRPr lang="ko-KR" altLang="en-US" sz="1000"/>
+          </a:p>
+          <a:p>
+            <a:pPr lvl="0">
+              <a:defRPr/>
+            </a:pPr>
+            <a:endParaRPr lang="ko-KR" altLang="en-US" sz="1000"/>
+          </a:p>
+          <a:p>
+            <a:pPr lvl="0">
+              <a:defRPr/>
+            </a:pPr>
+            <a:r>
+              <a:rPr lang="ko-KR" altLang="en-US" sz="1000"/>
+              <a:t>제일 큰 거 </a:t>
+            </a:r>
+            <a:r>
+              <a:rPr lang="en-US" altLang="ko-KR" sz="1000"/>
+              <a:t>-</a:t>
+            </a:r>
+            <a:r>
+              <a:rPr lang="ko-KR" altLang="en-US" sz="1000"/>
+              <a:t> 짧고</a:t>
+            </a:r>
+            <a:r>
+              <a:rPr lang="en-US" altLang="ko-KR" sz="1000"/>
+              <a:t>,</a:t>
+            </a:r>
+            <a:r>
+              <a:rPr lang="ko-KR" altLang="en-US" sz="1000"/>
+              <a:t> 간결하지만</a:t>
+            </a:r>
+            <a:r>
+              <a:rPr lang="en-US" altLang="ko-KR" sz="1000"/>
+              <a:t>,</a:t>
+            </a:r>
+            <a:r>
+              <a:rPr lang="ko-KR" altLang="en-US" sz="1000"/>
+              <a:t> 핵심을 찌르는 ㅂ내용</a:t>
+            </a:r>
+            <a:endParaRPr lang="ko-KR" altLang="en-US" sz="1000"/>
+          </a:p>
+          <a:p>
+            <a:pPr lvl="0">
+              <a:defRPr/>
+            </a:pPr>
+            <a:r>
+              <a:rPr lang="ko-KR" altLang="en-US" sz="1000"/>
+              <a:t>작은 거 </a:t>
+            </a:r>
+            <a:r>
+              <a:rPr lang="en-US" altLang="ko-KR" sz="1000"/>
+              <a:t>-</a:t>
+            </a:r>
+            <a:r>
+              <a:rPr lang="ko-KR" altLang="en-US" sz="1000"/>
+              <a:t> 간단한 설명</a:t>
+            </a:r>
+            <a:endParaRPr lang="ko-KR" altLang="en-US" sz="1000"/>
+          </a:p>
+          <a:p>
+            <a:pPr lvl="0">
+              <a:defRPr/>
+            </a:pPr>
+            <a:endParaRPr lang="ko-KR" altLang="en-US" sz="1000"/>
+          </a:p>
+          <a:p>
+            <a:pPr lvl="0">
+              <a:defRPr/>
+            </a:pPr>
+            <a:r>
+              <a:rPr lang="en-US" altLang="ko-KR" sz="1000"/>
+              <a:t>(</a:t>
+            </a:r>
+            <a:r>
+              <a:rPr lang="ko-KR" altLang="en-US" sz="1000"/>
+              <a:t>레퍼런스의 일본어 문구는 일단 무시</a:t>
+            </a:r>
+            <a:r>
+              <a:rPr lang="en-US" altLang="ko-KR" sz="1000"/>
+              <a:t>)</a:t>
+            </a:r>
+            <a:endParaRPr lang="en-US" altLang="ko-KR" sz="1000"/>
+          </a:p>
+          <a:p>
+            <a:pPr lvl="0">
+              <a:defRPr/>
+            </a:pPr>
+            <a:endParaRPr lang="ko-KR" altLang="en-US" sz="1000"/>
+          </a:p>
+          <a:p>
+            <a:pPr lvl="0">
+              <a:defRPr/>
+            </a:pPr>
+            <a:r>
+              <a:rPr lang="ko-KR" altLang="en-US" sz="1000"/>
+              <a:t>배치 변경 필요</a:t>
+            </a:r>
+            <a:r>
+              <a:rPr lang="en-US" altLang="ko-KR" sz="1000"/>
+              <a:t>(</a:t>
+            </a:r>
+            <a:r>
+              <a:rPr lang="ko-KR" altLang="en-US" sz="1000"/>
+              <a:t>방식은 아래에 후술</a:t>
+            </a:r>
+            <a:r>
+              <a:rPr lang="en-US" altLang="ko-KR" sz="1000"/>
+              <a:t>)</a:t>
+            </a:r>
+            <a:endParaRPr lang="en-US" altLang="ko-KR" sz="1000"/>
+          </a:p>
+        </p:txBody>
+      </p:sp>
+      <p:sp>
+        <p:nvSpPr>
+          <p:cNvPr id="22" name="가로 글상자 21"/>
+          <p:cNvSpPr txBox="1"/>
+          <p:nvPr/>
+        </p:nvSpPr>
+        <p:spPr>
+          <a:xfrm>
+            <a:off x="11491978" y="3689482"/>
+            <a:ext cx="384767" cy="1456424"/>
+          </a:xfrm>
+          <a:prstGeom prst="rect">
+            <a:avLst/>
+          </a:prstGeom>
+          <a:solidFill>
+            <a:srgbClr val="ffffff"/>
+          </a:solidFill>
+          <a:ln w="28575">
+            <a:solidFill>
+              <a:srgbClr val="ffff00"/>
+            </a:solidFill>
+          </a:ln>
+        </p:spPr>
+        <p:txBody>
+          <a:bodyPr wrap="square">
+            <a:spAutoFit/>
+          </a:bodyPr>
+          <a:p>
+            <a:pPr lvl="0" algn="ctr">
+              <a:defRPr/>
+            </a:pPr>
+            <a:r>
+              <a:rPr lang="en-US" altLang="ko-KR" sz="1000"/>
+              <a:t>S</a:t>
+            </a:r>
+            <a:endParaRPr lang="en-US" altLang="ko-KR" sz="1000"/>
+          </a:p>
+          <a:p>
+            <a:pPr lvl="0" algn="ctr">
+              <a:defRPr/>
+            </a:pPr>
+            <a:r>
+              <a:rPr lang="ko-KR" altLang="en-US" sz="1000"/>
+              <a:t>ㅡ</a:t>
+            </a:r>
+            <a:endParaRPr lang="ko-KR" altLang="en-US" sz="1000"/>
+          </a:p>
+          <a:p>
+            <a:pPr lvl="0" algn="ctr">
+              <a:defRPr/>
+            </a:pPr>
+            <a:r>
+              <a:rPr lang="en-US" altLang="ko-KR" sz="1000"/>
+              <a:t>Ch</a:t>
+            </a:r>
+            <a:endParaRPr lang="en-US" altLang="ko-KR" sz="1000"/>
+          </a:p>
+          <a:p>
+            <a:pPr lvl="0" algn="ctr">
+              <a:defRPr/>
+            </a:pPr>
+            <a:r>
+              <a:rPr lang="ko-KR" altLang="en-US" sz="1000"/>
+              <a:t>ㅡ</a:t>
+            </a:r>
+            <a:endParaRPr lang="ko-KR" altLang="en-US" sz="1000"/>
+          </a:p>
+          <a:p>
+            <a:pPr lvl="0" algn="ctr">
+              <a:defRPr/>
+            </a:pPr>
+            <a:r>
+              <a:rPr lang="en-US" altLang="ko-KR" sz="1000"/>
+              <a:t>F</a:t>
+            </a:r>
+            <a:endParaRPr lang="en-US" altLang="ko-KR" sz="1000"/>
+          </a:p>
+          <a:p>
+            <a:pPr lvl="0" algn="ctr">
+              <a:defRPr/>
+            </a:pPr>
+            <a:r>
+              <a:rPr lang="ko-KR" altLang="en-US" sz="1000"/>
+              <a:t>ㅡ</a:t>
+            </a:r>
+            <a:endParaRPr lang="ko-KR" altLang="en-US" sz="1000"/>
+          </a:p>
+          <a:p>
+            <a:pPr lvl="0" algn="ctr">
+              <a:defRPr/>
+            </a:pPr>
+            <a:r>
+              <a:rPr lang="en-US" altLang="ko-KR" sz="1000"/>
+              <a:t>D</a:t>
+            </a:r>
+            <a:endParaRPr lang="en-US" altLang="ko-KR" sz="1000"/>
+          </a:p>
+          <a:p>
+            <a:pPr lvl="0" algn="ctr">
+              <a:defRPr/>
+            </a:pPr>
+            <a:r>
+              <a:rPr lang="ko-KR" altLang="en-US" sz="1000"/>
+              <a:t>ㅡ</a:t>
+            </a:r>
+            <a:endParaRPr lang="ko-KR" altLang="en-US" sz="1000"/>
+          </a:p>
+          <a:p>
+            <a:pPr lvl="0" algn="ctr">
+              <a:defRPr/>
+            </a:pPr>
+            <a:r>
+              <a:rPr lang="en-US" altLang="ko-KR" sz="1000"/>
+              <a:t>Co</a:t>
+            </a:r>
+            <a:endParaRPr lang="en-US" altLang="ko-KR" sz="1000"/>
+          </a:p>
+        </p:txBody>
+      </p:sp>
+      <p:cxnSp>
+        <p:nvCxnSpPr>
+          <p:cNvPr id="23" name="화살표 22"/>
+          <p:cNvCxnSpPr>
+            <a:endCxn id="22" idx="1"/>
+          </p:cNvCxnSpPr>
+          <p:nvPr/>
+        </p:nvCxnSpPr>
+        <p:spPr>
+          <a:xfrm>
+            <a:off x="9048750" y="4361089"/>
+            <a:ext cx="2443228" cy="56606"/>
+          </a:xfrm>
+          <a:prstGeom prst="straightConnector1">
+            <a:avLst/>
+          </a:prstGeom>
+          <a:ln w="57150">
+            <a:solidFill>
+              <a:srgbClr val="ffff00"/>
+            </a:solidFill>
+            <a:tailEnd type="arrow"/>
+          </a:ln>
+        </p:spPr>
+        <p:style>
+          <a:lnRef idx="1">
+            <a:schemeClr val="accent1"/>
+          </a:lnRef>
+          <a:fillRef idx="0">
+            <a:schemeClr val="accent1"/>
+          </a:fillRef>
+          <a:effectRef idx="0">
+            <a:schemeClr val="accent1"/>
+          </a:effectRef>
+          <a:fontRef idx="minor">
+            <a:schemeClr val="tx1"/>
+          </a:fontRef>
+        </p:style>
+      </p:cxnSp>
+      <p:sp>
+        <p:nvSpPr>
+          <p:cNvPr id="24" name="직사각형 23"/>
+          <p:cNvSpPr/>
+          <p:nvPr/>
+        </p:nvSpPr>
+        <p:spPr>
+          <a:xfrm>
+            <a:off x="8470447" y="4211410"/>
+            <a:ext cx="578303" cy="206284"/>
+          </a:xfrm>
+          <a:prstGeom prst="rect">
+            <a:avLst/>
+          </a:prstGeom>
+          <a:noFill/>
+          <a:ln w="38100">
+            <a:solidFill>
+              <a:srgbClr val="ffff00"/>
+            </a:solidFill>
+          </a:ln>
+        </p:spPr>
+        <p:style>
+          <a:lnRef idx="2">
+            <a:schemeClr val="accent1">
+              <a:shade val="20000"/>
+            </a:schemeClr>
+          </a:lnRef>
+          <a:fillRef idx="1">
+            <a:schemeClr val="accent1"/>
+          </a:fillRef>
+          <a:effectRef idx="0">
+            <a:schemeClr val="accent1"/>
+          </a:effectRef>
+          <a:fontRef idx="minor">
+            <a:schemeClr val="lt1"/>
+          </a:fontRef>
+        </p:style>
+        <p:txBody>
+          <a:bodyPr anchor="ctr"/>
+          <a:p>
+            <a:pPr lvl="0" algn="ctr">
+              <a:defRPr/>
+            </a:pPr>
+            <a:endParaRPr lang="ko-KR" altLang="en-US"/>
+          </a:p>
+        </p:txBody>
+      </p:sp>
     </p:spTree>
     <p:extLst>
       <p:ext uri="{BB962C8B-B14F-4D97-AF65-F5344CB8AC3E}">
         <p14:creationId xmlns:p14="http://schemas.microsoft.com/office/powerpoint/2010/main" val="542576459"/>
+      </p:ext>
+    </p:extLst>
+  </p:cSld>
+  <p:clrMapOvr>
+    <a:masterClrMapping/>
+  </p:clrMapOvr>
+</p:sld>
+</file>
+
+<file path=ppt/slides/slide5.xml><?xml version="1.0" encoding="utf-8"?>
+<p:sld xmlns:r="http://schemas.openxmlformats.org/officeDocument/2006/relationships" xmlns:c="http://schemas.openxmlformats.org/drawingml/2006/chart" xmlns:a="http://schemas.openxmlformats.org/drawingml/2006/main" xmlns:dgm="http://schemas.openxmlformats.org/drawingml/2006/diagram" xmlns:dsp="http://schemas.microsoft.com/office/drawing/2008/diagram" xmlns:p="http://schemas.openxmlformats.org/presentationml/2006/main">
+  <p:cSld>
+    <p:spTree>
+      <p:nvGrpSpPr>
+        <p:cNvPr id="1" name=""/>
+        <p:cNvGrpSpPr/>
+        <p:nvPr/>
+      </p:nvGrpSpPr>
+      <p:grpSpPr>
+        <a:xfrm>
+          <a:off x="0" y="0"/>
+          <a:ext cx="0" cy="0"/>
+          <a:chOff x="0" y="0"/>
+          <a:chExt cx="0" cy="0"/>
+        </a:xfrm>
+      </p:grpSpPr>
+      <p:sp>
+        <p:nvSpPr>
+          <p:cNvPr id="4" name="가로 글상자 3"/>
+          <p:cNvSpPr txBox="1"/>
+          <p:nvPr/>
+        </p:nvSpPr>
+        <p:spPr>
+          <a:xfrm>
+            <a:off x="205015" y="204305"/>
+            <a:ext cx="4030363" cy="520071"/>
+          </a:xfrm>
+          <a:prstGeom prst="rect">
+            <a:avLst/>
+          </a:prstGeom>
+        </p:spPr>
+        <p:txBody>
+          <a:bodyPr wrap="square">
+            <a:spAutoFit/>
+          </a:bodyPr>
+          <a:p>
+            <a:pPr lvl="0">
+              <a:defRPr/>
+            </a:pPr>
+            <a:r>
+              <a:rPr lang="en-US" altLang="ko-KR" sz="2800"/>
+              <a:t>main -&gt; first -&gt; reference</a:t>
+            </a:r>
+            <a:endParaRPr lang="en-US" altLang="ko-KR" sz="2800"/>
+          </a:p>
+        </p:txBody>
+      </p:sp>
+      <p:pic>
+        <p:nvPicPr>
+          <p:cNvPr id="5" name="그림 4"/>
+          <p:cNvPicPr>
+            <a:picLocks noChangeAspect="1"/>
+          </p:cNvPicPr>
+          <p:nvPr/>
+        </p:nvPicPr>
+        <p:blipFill rotWithShape="1">
+          <a:blip r:embed="rId2"/>
+          <a:srcRect b="88160"/>
+          <a:stretch>
+            <a:fillRect/>
+          </a:stretch>
+        </p:blipFill>
+        <p:spPr>
+          <a:xfrm>
+            <a:off x="130777" y="959115"/>
+            <a:ext cx="11930444" cy="5679837"/>
+          </a:xfrm>
+          <a:prstGeom prst="rect">
+            <a:avLst/>
+          </a:prstGeom>
+        </p:spPr>
+      </p:pic>
+      <p:grpSp>
+        <p:nvGrpSpPr>
+          <p:cNvPr id="6" name="그룹 5"/>
+          <p:cNvGrpSpPr/>
+          <p:nvPr/>
+        </p:nvGrpSpPr>
+        <p:grpSpPr>
+          <a:xfrm rot="0">
+            <a:off x="4285943" y="1747361"/>
+            <a:ext cx="7325896" cy="4891590"/>
+            <a:chOff x="5190818" y="1539261"/>
+            <a:chExt cx="7325896" cy="4891590"/>
+          </a:xfrm>
+        </p:grpSpPr>
+        <p:sp>
+          <p:nvSpPr>
+            <p:cNvPr id="7" name="직사각형 8"/>
+            <p:cNvSpPr/>
+            <p:nvPr/>
+          </p:nvSpPr>
+          <p:spPr>
+            <a:xfrm>
+              <a:off x="5796179" y="1539261"/>
+              <a:ext cx="6720535" cy="4891590"/>
+            </a:xfrm>
+            <a:prstGeom prst="rect">
+              <a:avLst/>
+            </a:prstGeom>
+            <a:noFill/>
+            <a:ln w="38100">
+              <a:solidFill>
+                <a:srgbClr val="ff0000"/>
+              </a:solidFill>
+            </a:ln>
+          </p:spPr>
+          <p:style>
+            <a:lnRef idx="2">
+              <a:schemeClr val="accent1">
+                <a:shade val="20000"/>
+              </a:schemeClr>
+            </a:lnRef>
+            <a:fillRef idx="1">
+              <a:schemeClr val="accent1"/>
+            </a:fillRef>
+            <a:effectRef idx="0">
+              <a:schemeClr val="accent1"/>
+            </a:effectRef>
+            <a:fontRef idx="minor">
+              <a:schemeClr val="lt1"/>
+            </a:fontRef>
+          </p:style>
+          <p:txBody>
+            <a:bodyPr anchor="ctr"/>
+            <a:p>
+              <a:pPr lvl="0" algn="ctr">
+                <a:defRPr/>
+              </a:pPr>
+              <a:endParaRPr lang="ko-KR" altLang="en-US"/>
+            </a:p>
+          </p:txBody>
+        </p:sp>
+        <p:cxnSp>
+          <p:nvCxnSpPr>
+            <p:cNvPr id="8" name="화살표 9"/>
+            <p:cNvCxnSpPr>
+              <a:stCxn id="7" idx="1"/>
+              <a:endCxn id="9" idx="3"/>
+            </p:cNvCxnSpPr>
+            <p:nvPr/>
+          </p:nvCxnSpPr>
+          <p:spPr>
+            <a:xfrm rot="16200000" flipV="1">
+              <a:off x="4234168" y="2423045"/>
+              <a:ext cx="2518662" cy="605361"/>
+            </a:xfrm>
+            <a:prstGeom prst="straightConnector1">
+              <a:avLst/>
+            </a:prstGeom>
+            <a:ln w="28575">
+              <a:solidFill>
+                <a:srgbClr val="ff0000"/>
+              </a:solidFill>
+              <a:tailEnd type="arrow"/>
+            </a:ln>
+          </p:spPr>
+          <p:style>
+            <a:lnRef idx="1">
+              <a:schemeClr val="accent1"/>
+            </a:lnRef>
+            <a:fillRef idx="0">
+              <a:schemeClr val="accent1"/>
+            </a:fillRef>
+            <a:effectRef idx="0">
+              <a:schemeClr val="accent1"/>
+            </a:effectRef>
+            <a:fontRef idx="minor">
+              <a:schemeClr val="tx1"/>
+            </a:fontRef>
+          </p:style>
+        </p:cxnSp>
+      </p:grpSp>
+      <p:sp>
+        <p:nvSpPr>
+          <p:cNvPr id="9" name="가로 글상자 8"/>
+          <p:cNvSpPr txBox="1"/>
+          <p:nvPr/>
+        </p:nvSpPr>
+        <p:spPr>
+          <a:xfrm>
+            <a:off x="1401623" y="1251311"/>
+            <a:ext cx="2884320" cy="846366"/>
+          </a:xfrm>
+          <a:prstGeom prst="rect">
+            <a:avLst/>
+          </a:prstGeom>
+          <a:solidFill>
+            <a:srgbClr val="ffffff"/>
+          </a:solidFill>
+          <a:ln w="28575">
+            <a:solidFill>
+              <a:srgbClr val="ff0000"/>
+            </a:solidFill>
+          </a:ln>
+        </p:spPr>
+        <p:txBody>
+          <a:bodyPr wrap="square">
+            <a:spAutoFit/>
+          </a:bodyPr>
+          <a:p>
+            <a:pPr lvl="0">
+              <a:defRPr/>
+            </a:pPr>
+            <a:r>
+              <a:rPr lang="en-US" altLang="ko-KR" sz="1000"/>
+              <a:t>Nyxi</a:t>
+            </a:r>
+            <a:r>
+              <a:rPr lang="ko-KR" altLang="en-US" sz="1000"/>
+              <a:t> 캐릭터를 활용함</a:t>
+            </a:r>
+            <a:endParaRPr lang="ko-KR" altLang="en-US" sz="1000"/>
+          </a:p>
+          <a:p>
+            <a:pPr lvl="0">
+              <a:defRPr/>
+            </a:pPr>
+            <a:endParaRPr lang="ko-KR" altLang="en-US" sz="1000"/>
+          </a:p>
+          <a:p>
+            <a:pPr lvl="0">
+              <a:defRPr/>
+            </a:pPr>
+            <a:r>
+              <a:rPr lang="en-US" altLang="ko-KR" sz="1000"/>
+              <a:t>PixAI</a:t>
+            </a:r>
+            <a:r>
+              <a:rPr lang="ko-KR" altLang="en-US" sz="1000"/>
+              <a:t>를 활용할 예정으로 파일은 나중에 디렉토리에 저장하겠으니 활용 바람</a:t>
+            </a:r>
+            <a:r>
+              <a:rPr lang="en-US" altLang="ko-KR" sz="1000"/>
+              <a:t>(</a:t>
+            </a:r>
+            <a:r>
+              <a:rPr lang="ko-KR" altLang="en-US" sz="1000"/>
+              <a:t>아래에 있고</a:t>
+            </a:r>
+            <a:r>
+              <a:rPr lang="en-US" altLang="ko-KR" sz="1000"/>
+              <a:t>,</a:t>
+            </a:r>
+            <a:r>
+              <a:rPr lang="ko-KR" altLang="en-US" sz="1000"/>
+              <a:t> 대신 실제 페이지에서는 투명한 배경으로 삽입할 것</a:t>
+            </a:r>
+            <a:r>
+              <a:rPr lang="en-US" altLang="ko-KR" sz="1000"/>
+              <a:t>.)</a:t>
+            </a:r>
+            <a:endParaRPr lang="en-US" altLang="ko-KR" sz="1000"/>
+          </a:p>
+        </p:txBody>
+      </p:sp>
+      <p:grpSp>
+        <p:nvGrpSpPr>
+          <p:cNvPr id="10" name="그룹 9"/>
+          <p:cNvGrpSpPr/>
+          <p:nvPr/>
+        </p:nvGrpSpPr>
+        <p:grpSpPr>
+          <a:xfrm rot="0">
+            <a:off x="4891304" y="4114600"/>
+            <a:ext cx="6625286" cy="2462628"/>
+            <a:chOff x="5796179" y="734415"/>
+            <a:chExt cx="6625286" cy="2462628"/>
+          </a:xfrm>
+        </p:grpSpPr>
+        <p:sp>
+          <p:nvSpPr>
+            <p:cNvPr id="11" name="직사각형 8"/>
+            <p:cNvSpPr/>
+            <p:nvPr/>
+          </p:nvSpPr>
+          <p:spPr>
+            <a:xfrm>
+              <a:off x="5796179" y="1377336"/>
+              <a:ext cx="6625286" cy="1819707"/>
+            </a:xfrm>
+            <a:prstGeom prst="rect">
+              <a:avLst/>
+            </a:prstGeom>
+            <a:noFill/>
+            <a:ln w="38100">
+              <a:solidFill>
+                <a:srgbClr val="ff0000"/>
+              </a:solidFill>
+            </a:ln>
+          </p:spPr>
+          <p:style>
+            <a:lnRef idx="2">
+              <a:schemeClr val="accent1">
+                <a:shade val="20000"/>
+              </a:schemeClr>
+            </a:lnRef>
+            <a:fillRef idx="1">
+              <a:schemeClr val="accent1"/>
+            </a:fillRef>
+            <a:effectRef idx="0">
+              <a:schemeClr val="accent1"/>
+            </a:effectRef>
+            <a:fontRef idx="minor">
+              <a:schemeClr val="lt1"/>
+            </a:fontRef>
+          </p:style>
+          <p:txBody>
+            <a:bodyPr anchor="ctr"/>
+            <a:p>
+              <a:pPr lvl="0" algn="ctr">
+                <a:defRPr/>
+              </a:pPr>
+              <a:endParaRPr lang="ko-KR" altLang="en-US"/>
+            </a:p>
+          </p:txBody>
+        </p:sp>
+        <p:cxnSp>
+          <p:nvCxnSpPr>
+            <p:cNvPr id="12" name="화살표 9"/>
+            <p:cNvCxnSpPr>
+              <a:stCxn id="11" idx="0"/>
+              <a:endCxn id="13" idx="2"/>
+            </p:cNvCxnSpPr>
+            <p:nvPr/>
+          </p:nvCxnSpPr>
+          <p:spPr>
+            <a:xfrm rot="16200000" flipV="1">
+              <a:off x="8787361" y="1055876"/>
+              <a:ext cx="642924" cy="2"/>
+            </a:xfrm>
+            <a:prstGeom prst="straightConnector1">
+              <a:avLst/>
+            </a:prstGeom>
+            <a:ln w="28575">
+              <a:solidFill>
+                <a:srgbClr val="ff0000"/>
+              </a:solidFill>
+              <a:tailEnd type="arrow"/>
+            </a:ln>
+          </p:spPr>
+          <p:style>
+            <a:lnRef idx="1">
+              <a:schemeClr val="accent1"/>
+            </a:lnRef>
+            <a:fillRef idx="0">
+              <a:schemeClr val="accent1"/>
+            </a:fillRef>
+            <a:effectRef idx="0">
+              <a:schemeClr val="accent1"/>
+            </a:effectRef>
+            <a:fontRef idx="minor">
+              <a:schemeClr val="tx1"/>
+            </a:fontRef>
+          </p:style>
+        </p:cxnSp>
+      </p:grpSp>
+      <p:sp>
+        <p:nvSpPr>
+          <p:cNvPr id="13" name="가로 글상자 12"/>
+          <p:cNvSpPr txBox="1"/>
+          <p:nvPr/>
+        </p:nvSpPr>
+        <p:spPr>
+          <a:xfrm>
+            <a:off x="7035631" y="3573580"/>
+            <a:ext cx="2336632" cy="541020"/>
+          </a:xfrm>
+          <a:prstGeom prst="rect">
+            <a:avLst/>
+          </a:prstGeom>
+          <a:solidFill>
+            <a:srgbClr val="ffffff"/>
+          </a:solidFill>
+          <a:ln w="28575">
+            <a:solidFill>
+              <a:srgbClr val="ff0000"/>
+            </a:solidFill>
+          </a:ln>
+        </p:spPr>
+        <p:txBody>
+          <a:bodyPr wrap="square">
+            <a:spAutoFit/>
+          </a:bodyPr>
+          <a:p>
+            <a:pPr lvl="0">
+              <a:defRPr/>
+            </a:pPr>
+            <a:r>
+              <a:rPr lang="ko-KR" altLang="en-US" sz="1000"/>
+              <a:t>상술한 카피는 해당 위치로 배치할 것</a:t>
+            </a:r>
+            <a:r>
+              <a:rPr lang="en-US" altLang="ko-KR" sz="1000"/>
+              <a:t>.</a:t>
+            </a:r>
+            <a:endParaRPr lang="en-US" altLang="ko-KR" sz="1000"/>
+          </a:p>
+          <a:p>
+            <a:pPr lvl="0">
+              <a:defRPr/>
+            </a:pPr>
+            <a:endParaRPr lang="en-US" altLang="ko-KR" sz="1000"/>
+          </a:p>
+          <a:p>
+            <a:pPr lvl="0">
+              <a:defRPr/>
+            </a:pPr>
+            <a:r>
+              <a:rPr lang="ko-KR" altLang="en-US" sz="1000"/>
+              <a:t>오른쪽 정렬으로 할 것</a:t>
+            </a:r>
+            <a:r>
+              <a:rPr lang="en-US" altLang="ko-KR" sz="1000"/>
+              <a:t>.</a:t>
+            </a:r>
+            <a:endParaRPr lang="en-US" altLang="ko-KR" sz="1000"/>
+          </a:p>
+        </p:txBody>
+      </p:sp>
+      <p:pic>
+        <p:nvPicPr>
+          <p:cNvPr id="14" name="그림 13"/>
+          <p:cNvPicPr>
+            <a:picLocks noChangeAspect="1"/>
+          </p:cNvPicPr>
+          <p:nvPr/>
+        </p:nvPicPr>
+        <p:blipFill rotWithShape="1">
+          <a:blip r:embed="rId3"/>
+          <a:stretch>
+            <a:fillRect/>
+          </a:stretch>
+        </p:blipFill>
+        <p:spPr>
+          <a:xfrm>
+            <a:off x="1456346" y="2245823"/>
+            <a:ext cx="2588531" cy="4314219"/>
+          </a:xfrm>
+          <a:prstGeom prst="rect">
+            <a:avLst/>
+          </a:prstGeom>
+        </p:spPr>
+      </p:pic>
+      <p:sp>
+        <p:nvSpPr>
+          <p:cNvPr id="15" name="가로 글상자 14"/>
+          <p:cNvSpPr txBox="1"/>
+          <p:nvPr/>
+        </p:nvSpPr>
+        <p:spPr>
+          <a:xfrm>
+            <a:off x="3920815" y="299148"/>
+            <a:ext cx="7779607" cy="822897"/>
+          </a:xfrm>
+          <a:prstGeom prst="rect">
+            <a:avLst/>
+          </a:prstGeom>
+          <a:solidFill>
+            <a:srgbClr val="ffffff"/>
+          </a:solidFill>
+          <a:ln w="28575">
+            <a:solidFill>
+              <a:srgbClr val="ff0000"/>
+            </a:solidFill>
+          </a:ln>
+        </p:spPr>
+        <p:txBody>
+          <a:bodyPr wrap="square">
+            <a:spAutoFit/>
+          </a:bodyPr>
+          <a:p>
+            <a:pPr lvl="0">
+              <a:defRPr/>
+            </a:pPr>
+            <a:r>
+              <a:rPr lang="ko-KR" altLang="en-US" sz="1600"/>
+              <a:t>전체적인 색감 </a:t>
+            </a:r>
+            <a:r>
+              <a:rPr lang="en-US" altLang="ko-KR" sz="1600"/>
+              <a:t>:</a:t>
+            </a:r>
+            <a:r>
+              <a:rPr lang="ko-KR" altLang="en-US" sz="1600"/>
+              <a:t>  </a:t>
+            </a:r>
+            <a:r>
+              <a:rPr lang="en-US" altLang="ko-KR" sz="1600"/>
+              <a:t>Black And White</a:t>
+            </a:r>
+            <a:r>
+              <a:rPr lang="ko-KR" altLang="en-US" sz="1600"/>
+              <a:t>가 메인</a:t>
+            </a:r>
+            <a:r>
+              <a:rPr lang="en-US" altLang="ko-KR" sz="1600"/>
+              <a:t>,</a:t>
+            </a:r>
+            <a:r>
+              <a:rPr lang="ko-KR" altLang="en-US" sz="1600"/>
+              <a:t> </a:t>
+            </a:r>
+            <a:r>
+              <a:rPr lang="en-US" altLang="ko-KR" sz="1600"/>
+              <a:t>Violet</a:t>
+            </a:r>
+            <a:r>
+              <a:rPr lang="ko-KR" altLang="en-US" sz="1600"/>
+              <a:t>이 포인트를 주는 방식</a:t>
+            </a:r>
+            <a:endParaRPr lang="ko-KR" altLang="en-US" sz="1600"/>
+          </a:p>
+          <a:p>
+            <a:pPr lvl="0">
+              <a:defRPr/>
+            </a:pPr>
+            <a:endParaRPr lang="ko-KR" altLang="en-US" sz="1600"/>
+          </a:p>
+          <a:p>
+            <a:pPr lvl="0">
+              <a:defRPr/>
+            </a:pPr>
+            <a:r>
+              <a:rPr lang="ko-KR" altLang="en-US" sz="1600"/>
+              <a:t>캐릭터 주변의 </a:t>
+            </a:r>
+            <a:r>
+              <a:rPr lang="en-US" altLang="ko-KR" sz="1600"/>
+              <a:t>(reference</a:t>
+            </a:r>
+            <a:r>
+              <a:rPr lang="ko-KR" altLang="en-US" sz="1600"/>
+              <a:t>의 파란 전파</a:t>
+            </a:r>
+            <a:r>
+              <a:rPr lang="en-US" altLang="ko-KR" sz="1600"/>
+              <a:t>?</a:t>
+            </a:r>
+            <a:r>
+              <a:rPr lang="ko-KR" altLang="en-US" sz="1600"/>
+              <a:t> 이미지 같은</a:t>
+            </a:r>
+            <a:r>
+              <a:rPr lang="en-US" altLang="ko-KR" sz="1600"/>
+              <a:t>)</a:t>
+            </a:r>
+            <a:r>
+              <a:rPr lang="ko-KR" altLang="en-US" sz="1600"/>
+              <a:t> 장식은 아직 넣지 말것</a:t>
+            </a:r>
+            <a:r>
+              <a:rPr lang="en-US" altLang="ko-KR" sz="1600"/>
+              <a:t>.</a:t>
+            </a:r>
+            <a:endParaRPr lang="en-US" altLang="ko-KR" sz="1600"/>
+          </a:p>
+        </p:txBody>
+      </p:sp>
+    </p:spTree>
+    <p:extLst>
+      <p:ext uri="{BB962C8B-B14F-4D97-AF65-F5344CB8AC3E}">
+        <p14:creationId xmlns:p14="http://schemas.microsoft.com/office/powerpoint/2010/main" val="1795092998"/>
       </p:ext>
     </p:extLst>
   </p:cSld>
